--- a/01_ModelisationAM/Colle_01_AM/images/Figures.pptx
+++ b/01_ModelisationAM/Colle_01_AM/images/Figures.pptx
@@ -290,7 +290,7 @@
             <a:fld id="{AA309A6D-C09C-4548-B29A-6CF363A7E532}" type="datetimeFigureOut">
               <a:rPr lang="fr-FR" smtClean="0"/>
               <a:pPr/>
-              <a:t>04/04/2014</a:t>
+              <a:t>06/04/2014</a:t>
             </a:fld>
             <a:endParaRPr lang="fr-BE"/>
           </a:p>
@@ -457,7 +457,7 @@
             <a:fld id="{AA309A6D-C09C-4548-B29A-6CF363A7E532}" type="datetimeFigureOut">
               <a:rPr lang="fr-FR" smtClean="0"/>
               <a:pPr/>
-              <a:t>04/04/2014</a:t>
+              <a:t>06/04/2014</a:t>
             </a:fld>
             <a:endParaRPr lang="fr-BE"/>
           </a:p>
@@ -634,7 +634,7 @@
             <a:fld id="{AA309A6D-C09C-4548-B29A-6CF363A7E532}" type="datetimeFigureOut">
               <a:rPr lang="fr-FR" smtClean="0"/>
               <a:pPr/>
-              <a:t>04/04/2014</a:t>
+              <a:t>06/04/2014</a:t>
             </a:fld>
             <a:endParaRPr lang="fr-BE"/>
           </a:p>
@@ -801,7 +801,7 @@
             <a:fld id="{AA309A6D-C09C-4548-B29A-6CF363A7E532}" type="datetimeFigureOut">
               <a:rPr lang="fr-FR" smtClean="0"/>
               <a:pPr/>
-              <a:t>04/04/2014</a:t>
+              <a:t>06/04/2014</a:t>
             </a:fld>
             <a:endParaRPr lang="fr-BE"/>
           </a:p>
@@ -1044,7 +1044,7 @@
             <a:fld id="{AA309A6D-C09C-4548-B29A-6CF363A7E532}" type="datetimeFigureOut">
               <a:rPr lang="fr-FR" smtClean="0"/>
               <a:pPr/>
-              <a:t>04/04/2014</a:t>
+              <a:t>06/04/2014</a:t>
             </a:fld>
             <a:endParaRPr lang="fr-BE"/>
           </a:p>
@@ -1329,7 +1329,7 @@
             <a:fld id="{AA309A6D-C09C-4548-B29A-6CF363A7E532}" type="datetimeFigureOut">
               <a:rPr lang="fr-FR" smtClean="0"/>
               <a:pPr/>
-              <a:t>04/04/2014</a:t>
+              <a:t>06/04/2014</a:t>
             </a:fld>
             <a:endParaRPr lang="fr-BE"/>
           </a:p>
@@ -1748,7 +1748,7 @@
             <a:fld id="{AA309A6D-C09C-4548-B29A-6CF363A7E532}" type="datetimeFigureOut">
               <a:rPr lang="fr-FR" smtClean="0"/>
               <a:pPr/>
-              <a:t>04/04/2014</a:t>
+              <a:t>06/04/2014</a:t>
             </a:fld>
             <a:endParaRPr lang="fr-BE"/>
           </a:p>
@@ -1863,7 +1863,7 @@
             <a:fld id="{AA309A6D-C09C-4548-B29A-6CF363A7E532}" type="datetimeFigureOut">
               <a:rPr lang="fr-FR" smtClean="0"/>
               <a:pPr/>
-              <a:t>04/04/2014</a:t>
+              <a:t>06/04/2014</a:t>
             </a:fld>
             <a:endParaRPr lang="fr-BE"/>
           </a:p>
@@ -1955,7 +1955,7 @@
             <a:fld id="{AA309A6D-C09C-4548-B29A-6CF363A7E532}" type="datetimeFigureOut">
               <a:rPr lang="fr-FR" smtClean="0"/>
               <a:pPr/>
-              <a:t>04/04/2014</a:t>
+              <a:t>06/04/2014</a:t>
             </a:fld>
             <a:endParaRPr lang="fr-BE"/>
           </a:p>
@@ -2229,7 +2229,7 @@
             <a:fld id="{AA309A6D-C09C-4548-B29A-6CF363A7E532}" type="datetimeFigureOut">
               <a:rPr lang="fr-FR" smtClean="0"/>
               <a:pPr/>
-              <a:t>04/04/2014</a:t>
+              <a:t>06/04/2014</a:t>
             </a:fld>
             <a:endParaRPr lang="fr-BE"/>
           </a:p>
@@ -2479,7 +2479,7 @@
             <a:fld id="{AA309A6D-C09C-4548-B29A-6CF363A7E532}" type="datetimeFigureOut">
               <a:rPr lang="fr-FR" smtClean="0"/>
               <a:pPr/>
-              <a:t>04/04/2014</a:t>
+              <a:t>06/04/2014</a:t>
             </a:fld>
             <a:endParaRPr lang="fr-BE"/>
           </a:p>
@@ -2689,7 +2689,7 @@
             <a:fld id="{AA309A6D-C09C-4548-B29A-6CF363A7E532}" type="datetimeFigureOut">
               <a:rPr lang="fr-FR" smtClean="0"/>
               <a:pPr/>
-              <a:t>04/04/2014</a:t>
+              <a:t>06/04/2014</a:t>
             </a:fld>
             <a:endParaRPr lang="fr-BE"/>
           </a:p>
@@ -3179,7 +3179,7 @@
         <p:spPr>
           <a:xfrm>
             <a:off x="1000102" y="2643184"/>
-            <a:ext cx="678659" cy="1587"/>
+            <a:ext cx="678659" cy="0"/>
           </a:xfrm>
           <a:prstGeom prst="straightConnector1">
             <a:avLst/>
@@ -3304,8 +3304,8 @@
           </a:fontRef>
         </p:style>
       </p:cxnSp>
-      <mc:AlternateContent xmlns:mc="http://schemas.openxmlformats.org/markup-compatibility/2006">
-        <mc:Choice xmlns:a14="http://schemas.microsoft.com/office/drawing/2010/main" Requires="a14">
+      <mc:AlternateContent xmlns:mc="http://schemas.openxmlformats.org/markup-compatibility/2006" xmlns:a14="http://schemas.microsoft.com/office/drawing/2010/main">
+        <mc:Choice Requires="a14">
           <p:sp>
             <p:nvSpPr>
               <p:cNvPr id="8" name="ZoneTexte 7"/>
@@ -3328,6 +3328,7 @@
               </a:bodyPr>
               <a:lstStyle/>
               <a:p>
+                <a:pPr/>
                 <a14:m>
                   <m:oMathPara xmlns:m="http://schemas.openxmlformats.org/officeDocument/2006/math">
                     <m:oMathParaPr>
@@ -3360,7 +3361,7 @@
             </p:txBody>
           </p:sp>
         </mc:Choice>
-        <mc:Fallback>
+        <mc:Fallback xmlns="">
           <p:sp>
             <p:nvSpPr>
               <p:cNvPr id="8" name="ZoneTexte 7"/>
@@ -3531,8 +3532,8 @@
           </a:fontRef>
         </p:style>
       </p:cxnSp>
-      <mc:AlternateContent xmlns:mc="http://schemas.openxmlformats.org/markup-compatibility/2006">
-        <mc:Choice xmlns:a14="http://schemas.microsoft.com/office/drawing/2010/main" Requires="a14">
+      <mc:AlternateContent xmlns:mc="http://schemas.openxmlformats.org/markup-compatibility/2006" xmlns:a14="http://schemas.microsoft.com/office/drawing/2010/main">
+        <mc:Choice Requires="a14">
           <p:sp>
             <p:nvSpPr>
               <p:cNvPr id="10" name="ZoneTexte 9"/>
@@ -3555,6 +3556,7 @@
               </a:bodyPr>
               <a:lstStyle/>
               <a:p>
+                <a:pPr/>
                 <a14:m>
                   <m:oMathPara xmlns:m="http://schemas.openxmlformats.org/officeDocument/2006/math">
                     <m:oMathParaPr>
@@ -3587,7 +3589,7 @@
             </p:txBody>
           </p:sp>
         </mc:Choice>
-        <mc:Fallback>
+        <mc:Fallback xmlns="">
           <p:sp>
             <p:nvSpPr>
               <p:cNvPr id="10" name="ZoneTexte 9"/>
@@ -3626,8 +3628,8 @@
           </p:sp>
         </mc:Fallback>
       </mc:AlternateContent>
-      <mc:AlternateContent xmlns:mc="http://schemas.openxmlformats.org/markup-compatibility/2006">
-        <mc:Choice xmlns:a14="http://schemas.microsoft.com/office/drawing/2010/main" Requires="a14">
+      <mc:AlternateContent xmlns:mc="http://schemas.openxmlformats.org/markup-compatibility/2006" xmlns:a14="http://schemas.microsoft.com/office/drawing/2010/main">
+        <mc:Choice Requires="a14">
           <p:sp>
             <p:nvSpPr>
               <p:cNvPr id="12" name="ZoneTexte 11"/>
@@ -3650,6 +3652,7 @@
               </a:bodyPr>
               <a:lstStyle/>
               <a:p>
+                <a:pPr/>
                 <a14:m>
                   <m:oMathPara xmlns:m="http://schemas.openxmlformats.org/officeDocument/2006/math">
                     <m:oMathParaPr>
@@ -3682,7 +3685,7 @@
             </p:txBody>
           </p:sp>
         </mc:Choice>
-        <mc:Fallback>
+        <mc:Fallback xmlns="">
           <p:sp>
             <p:nvSpPr>
               <p:cNvPr id="12" name="ZoneTexte 11"/>
@@ -3980,8 +3983,8 @@
           </a:fontRef>
         </p:style>
       </p:cxnSp>
-      <mc:AlternateContent xmlns:mc="http://schemas.openxmlformats.org/markup-compatibility/2006">
-        <mc:Choice xmlns:a14="http://schemas.microsoft.com/office/drawing/2010/main" Requires="a14">
+      <mc:AlternateContent xmlns:mc="http://schemas.openxmlformats.org/markup-compatibility/2006" xmlns:a14="http://schemas.microsoft.com/office/drawing/2010/main">
+        <mc:Choice Requires="a14">
           <p:sp>
             <p:nvSpPr>
               <p:cNvPr id="23" name="ZoneTexte 22"/>
@@ -4004,6 +4007,7 @@
               </a:bodyPr>
               <a:lstStyle/>
               <a:p>
+                <a:pPr/>
                 <a14:m>
                   <m:oMathPara xmlns:m="http://schemas.openxmlformats.org/officeDocument/2006/math">
                     <m:oMathParaPr>
@@ -4036,7 +4040,7 @@
             </p:txBody>
           </p:sp>
         </mc:Choice>
-        <mc:Fallback>
+        <mc:Fallback xmlns="">
           <p:sp>
             <p:nvSpPr>
               <p:cNvPr id="23" name="ZoneTexte 22"/>
@@ -4075,8 +4079,8 @@
           </p:sp>
         </mc:Fallback>
       </mc:AlternateContent>
-      <mc:AlternateContent xmlns:mc="http://schemas.openxmlformats.org/markup-compatibility/2006">
-        <mc:Choice xmlns:a14="http://schemas.microsoft.com/office/drawing/2010/main" Requires="a14">
+      <mc:AlternateContent xmlns:mc="http://schemas.openxmlformats.org/markup-compatibility/2006" xmlns:a14="http://schemas.microsoft.com/office/drawing/2010/main">
+        <mc:Choice Requires="a14">
           <p:sp>
             <p:nvSpPr>
               <p:cNvPr id="24" name="ZoneTexte 23"/>
@@ -4099,6 +4103,7 @@
               </a:bodyPr>
               <a:lstStyle/>
               <a:p>
+                <a:pPr/>
                 <a14:m>
                   <m:oMathPara xmlns:m="http://schemas.openxmlformats.org/officeDocument/2006/math">
                     <m:oMathParaPr>
@@ -4119,7 +4124,7 @@
             </p:txBody>
           </p:sp>
         </mc:Choice>
-        <mc:Fallback>
+        <mc:Fallback xmlns="">
           <p:sp>
             <p:nvSpPr>
               <p:cNvPr id="24" name="ZoneTexte 23"/>
@@ -4195,8 +4200,8 @@
           </a:fontRef>
         </p:style>
       </p:cxnSp>
-      <mc:AlternateContent xmlns:mc="http://schemas.openxmlformats.org/markup-compatibility/2006">
-        <mc:Choice xmlns:a14="http://schemas.microsoft.com/office/drawing/2010/main" Requires="a14">
+      <mc:AlternateContent xmlns:mc="http://schemas.openxmlformats.org/markup-compatibility/2006" xmlns:a14="http://schemas.microsoft.com/office/drawing/2010/main">
+        <mc:Choice Requires="a14">
           <p:sp>
             <p:nvSpPr>
               <p:cNvPr id="28" name="ZoneTexte 27"/>
@@ -4219,6 +4224,7 @@
               </a:bodyPr>
               <a:lstStyle/>
               <a:p>
+                <a:pPr/>
                 <a14:m>
                   <m:oMathPara xmlns:m="http://schemas.openxmlformats.org/officeDocument/2006/math">
                     <m:oMathParaPr>
@@ -4239,7 +4245,7 @@
             </p:txBody>
           </p:sp>
         </mc:Choice>
-        <mc:Fallback>
+        <mc:Fallback xmlns="">
           <p:sp>
             <p:nvSpPr>
               <p:cNvPr id="28" name="ZoneTexte 27"/>
@@ -4326,8 +4332,8 @@
           </a:p>
         </p:txBody>
       </p:sp>
-      <mc:AlternateContent xmlns:mc="http://schemas.openxmlformats.org/markup-compatibility/2006">
-        <mc:Choice xmlns:a14="http://schemas.microsoft.com/office/drawing/2010/main" Requires="a14">
+      <mc:AlternateContent xmlns:mc="http://schemas.openxmlformats.org/markup-compatibility/2006" xmlns:a14="http://schemas.microsoft.com/office/drawing/2010/main">
+        <mc:Choice Requires="a14">
           <p:sp>
             <p:nvSpPr>
               <p:cNvPr id="30" name="ZoneTexte 29"/>
@@ -4350,6 +4356,7 @@
               </a:bodyPr>
               <a:lstStyle/>
               <a:p>
+                <a:pPr/>
                 <a14:m>
                   <m:oMathPara xmlns:m="http://schemas.openxmlformats.org/officeDocument/2006/math">
                     <m:oMathParaPr>
@@ -4370,7 +4377,7 @@
             </p:txBody>
           </p:sp>
         </mc:Choice>
-        <mc:Fallback>
+        <mc:Fallback xmlns="">
           <p:sp>
             <p:nvSpPr>
               <p:cNvPr id="30" name="ZoneTexte 29"/>
@@ -4409,8 +4416,8 @@
           </p:sp>
         </mc:Fallback>
       </mc:AlternateContent>
-      <mc:AlternateContent xmlns:mc="http://schemas.openxmlformats.org/markup-compatibility/2006">
-        <mc:Choice xmlns:a14="http://schemas.microsoft.com/office/drawing/2010/main" Requires="a14">
+      <mc:AlternateContent xmlns:mc="http://schemas.openxmlformats.org/markup-compatibility/2006" xmlns:a14="http://schemas.microsoft.com/office/drawing/2010/main">
+        <mc:Choice Requires="a14">
           <p:sp>
             <p:nvSpPr>
               <p:cNvPr id="31" name="ZoneTexte 30"/>
@@ -4433,6 +4440,7 @@
               </a:bodyPr>
               <a:lstStyle/>
               <a:p>
+                <a:pPr/>
                 <a14:m>
                   <m:oMathPara xmlns:m="http://schemas.openxmlformats.org/officeDocument/2006/math">
                     <m:oMathParaPr>
@@ -4453,7 +4461,7 @@
             </p:txBody>
           </p:sp>
         </mc:Choice>
-        <mc:Fallback>
+        <mc:Fallback xmlns="">
           <p:sp>
             <p:nvSpPr>
               <p:cNvPr id="31" name="ZoneTexte 30"/>
@@ -4492,8 +4500,8 @@
           </p:sp>
         </mc:Fallback>
       </mc:AlternateContent>
-      <mc:AlternateContent xmlns:mc="http://schemas.openxmlformats.org/markup-compatibility/2006">
-        <mc:Choice xmlns:a14="http://schemas.microsoft.com/office/drawing/2010/main" Requires="a14">
+      <mc:AlternateContent xmlns:mc="http://schemas.openxmlformats.org/markup-compatibility/2006" xmlns:a14="http://schemas.microsoft.com/office/drawing/2010/main">
+        <mc:Choice Requires="a14">
           <p:sp>
             <p:nvSpPr>
               <p:cNvPr id="32" name="ZoneTexte 31"/>
@@ -4516,6 +4524,7 @@
               </a:bodyPr>
               <a:lstStyle/>
               <a:p>
+                <a:pPr/>
                 <a14:m>
                   <m:oMathPara xmlns:m="http://schemas.openxmlformats.org/officeDocument/2006/math">
                     <m:oMathParaPr>
@@ -4536,7 +4545,7 @@
             </p:txBody>
           </p:sp>
         </mc:Choice>
-        <mc:Fallback>
+        <mc:Fallback xmlns="">
           <p:sp>
             <p:nvSpPr>
               <p:cNvPr id="32" name="ZoneTexte 31"/>
@@ -4646,8 +4655,8 @@
           </a:fontRef>
         </p:style>
       </p:cxnSp>
-      <mc:AlternateContent xmlns:mc="http://schemas.openxmlformats.org/markup-compatibility/2006">
-        <mc:Choice xmlns:a14="http://schemas.microsoft.com/office/drawing/2010/main" Requires="a14">
+      <mc:AlternateContent xmlns:mc="http://schemas.openxmlformats.org/markup-compatibility/2006" xmlns:a14="http://schemas.microsoft.com/office/drawing/2010/main">
+        <mc:Choice Requires="a14">
           <p:sp>
             <p:nvSpPr>
               <p:cNvPr id="39" name="ZoneTexte 38"/>
@@ -4670,6 +4679,7 @@
               </a:bodyPr>
               <a:lstStyle/>
               <a:p>
+                <a:pPr/>
                 <a14:m>
                   <m:oMathPara xmlns:m="http://schemas.openxmlformats.org/officeDocument/2006/math">
                     <m:oMathParaPr>
@@ -4690,7 +4700,7 @@
             </p:txBody>
           </p:sp>
         </mc:Choice>
-        <mc:Fallback>
+        <mc:Fallback xmlns="">
           <p:sp>
             <p:nvSpPr>
               <p:cNvPr id="39" name="ZoneTexte 38"/>
